--- a/outputs/lot3.pptx
+++ b/outputs/lot3.pptx
@@ -3711,7 +3711,7 @@
                 </a:solidFill>
                 <a:latin typeface="Alegreya Sans"/>
               </a:rPr>
-              <a:t>EXPÉRIENCE PROFESSIONNELLE</a:t>
+              <a:t>PRINCIPALES EXPÉRIENCES PROFESSIONNELLES</a:t>
             </a:r>
           </a:p>
           <a:p>
@@ -4776,7 +4776,7 @@
                 </a:solidFill>
                 <a:latin typeface="Alegreya Sans"/>
               </a:rPr>
-              <a:t>PROFESSIONAL EXPERIENCE</a:t>
+              <a:t>MAIN PROFESSIONAL EXPERIENCE</a:t>
             </a:r>
           </a:p>
           <a:p>
@@ -5960,7 +5960,7 @@
                 </a:solidFill>
                 <a:latin typeface="Alegreya Sans"/>
               </a:rPr>
-              <a:t>EXPÉRIENCE PROFESSIONNELLE</a:t>
+              <a:t>PRINCIPALES EXPÉRIENCES PROFESSIONNELLES</a:t>
             </a:r>
           </a:p>
           <a:p>
@@ -7169,7 +7169,7 @@
                 </a:solidFill>
                 <a:latin typeface="Alegreya Sans"/>
               </a:rPr>
-              <a:t>PROFESSIONAL EXPERIENCE</a:t>
+              <a:t>MAIN PROFESSIONAL EXPERIENCE</a:t>
             </a:r>
           </a:p>
           <a:p>
@@ -8434,7 +8434,7 @@
                 </a:solidFill>
                 <a:latin typeface="Alegreya Sans"/>
               </a:rPr>
-              <a:t>EXPÉRIENCE PROFESSIONNELLE</a:t>
+              <a:t>PRINCIPALES EXPÉRIENCES PROFESSIONNELLES</a:t>
             </a:r>
           </a:p>
           <a:p>
@@ -9548,7 +9548,7 @@
                 </a:solidFill>
                 <a:latin typeface="Alegreya Sans"/>
               </a:rPr>
-              <a:t>PROFESSIONAL EXPERIENCE</a:t>
+              <a:t>MAIN PROFESSIONAL EXPERIENCE</a:t>
             </a:r>
           </a:p>
           <a:p>
@@ -10605,7 +10605,7 @@
                 </a:solidFill>
                 <a:latin typeface="Alegreya Sans"/>
               </a:rPr>
-              <a:t>EXPÉRIENCE PROFESSIONNELLE</a:t>
+              <a:t>PRINCIPALES EXPÉRIENCES PROFESSIONNELLES</a:t>
             </a:r>
           </a:p>
           <a:p>
@@ -11823,7 +11823,7 @@
                 </a:solidFill>
                 <a:latin typeface="Alegreya Sans"/>
               </a:rPr>
-              <a:t>PROFESSIONAL EXPERIENCE</a:t>
+              <a:t>MAIN PROFESSIONAL EXPERIENCE</a:t>
             </a:r>
           </a:p>
           <a:p>
